--- a/VLSI design 설계 실습/2025-05-29.pptx
+++ b/VLSI design 설계 실습/2025-05-29.pptx
@@ -6,10 +6,12 @@
   </p:sldMasterIdLst>
   <p:sldIdLst>
     <p:sldId id="256" r:id="rId2"/>
-    <p:sldId id="257" r:id="rId3"/>
-    <p:sldId id="259" r:id="rId4"/>
+    <p:sldId id="262" r:id="rId3"/>
+    <p:sldId id="258" r:id="rId4"/>
     <p:sldId id="260" r:id="rId5"/>
-    <p:sldId id="258" r:id="rId6"/>
+    <p:sldId id="257" r:id="rId6"/>
+    <p:sldId id="261" r:id="rId7"/>
+    <p:sldId id="259" r:id="rId8"/>
   </p:sldIdLst>
   <p:sldSz cx="12192000" cy="6858000"/>
   <p:notesSz cx="6858000" cy="9144000"/>
@@ -495,7 +497,7 @@
           <a:p>
             <a:fld id="{1BE5052F-5850-43E1-B7E1-93792622382B}" type="datetimeFigureOut">
               <a:rPr lang="ko-KR" altLang="en-US" smtClean="0"/>
-              <a:t>2025-06-15</a:t>
+              <a:t>2025-06-16</a:t>
             </a:fld>
             <a:endParaRPr lang="ko-KR" altLang="en-US"/>
           </a:p>
@@ -693,7 +695,7 @@
           <a:p>
             <a:fld id="{1BE5052F-5850-43E1-B7E1-93792622382B}" type="datetimeFigureOut">
               <a:rPr lang="ko-KR" altLang="en-US" smtClean="0"/>
-              <a:t>2025-06-15</a:t>
+              <a:t>2025-06-16</a:t>
             </a:fld>
             <a:endParaRPr lang="ko-KR" altLang="en-US"/>
           </a:p>
@@ -901,7 +903,7 @@
           <a:p>
             <a:fld id="{1BE5052F-5850-43E1-B7E1-93792622382B}" type="datetimeFigureOut">
               <a:rPr lang="ko-KR" altLang="en-US" smtClean="0"/>
-              <a:t>2025-06-15</a:t>
+              <a:t>2025-06-16</a:t>
             </a:fld>
             <a:endParaRPr lang="ko-KR" altLang="en-US"/>
           </a:p>
@@ -1099,7 +1101,7 @@
           <a:p>
             <a:fld id="{1BE5052F-5850-43E1-B7E1-93792622382B}" type="datetimeFigureOut">
               <a:rPr lang="ko-KR" altLang="en-US" smtClean="0"/>
-              <a:t>2025-06-15</a:t>
+              <a:t>2025-06-16</a:t>
             </a:fld>
             <a:endParaRPr lang="ko-KR" altLang="en-US"/>
           </a:p>
@@ -1374,7 +1376,7 @@
           <a:p>
             <a:fld id="{1BE5052F-5850-43E1-B7E1-93792622382B}" type="datetimeFigureOut">
               <a:rPr lang="ko-KR" altLang="en-US" smtClean="0"/>
-              <a:t>2025-06-15</a:t>
+              <a:t>2025-06-16</a:t>
             </a:fld>
             <a:endParaRPr lang="ko-KR" altLang="en-US"/>
           </a:p>
@@ -1639,7 +1641,7 @@
           <a:p>
             <a:fld id="{1BE5052F-5850-43E1-B7E1-93792622382B}" type="datetimeFigureOut">
               <a:rPr lang="ko-KR" altLang="en-US" smtClean="0"/>
-              <a:t>2025-06-15</a:t>
+              <a:t>2025-06-16</a:t>
             </a:fld>
             <a:endParaRPr lang="ko-KR" altLang="en-US"/>
           </a:p>
@@ -2051,7 +2053,7 @@
           <a:p>
             <a:fld id="{1BE5052F-5850-43E1-B7E1-93792622382B}" type="datetimeFigureOut">
               <a:rPr lang="ko-KR" altLang="en-US" smtClean="0"/>
-              <a:t>2025-06-15</a:t>
+              <a:t>2025-06-16</a:t>
             </a:fld>
             <a:endParaRPr lang="ko-KR" altLang="en-US"/>
           </a:p>
@@ -2192,7 +2194,7 @@
           <a:p>
             <a:fld id="{1BE5052F-5850-43E1-B7E1-93792622382B}" type="datetimeFigureOut">
               <a:rPr lang="ko-KR" altLang="en-US" smtClean="0"/>
-              <a:t>2025-06-15</a:t>
+              <a:t>2025-06-16</a:t>
             </a:fld>
             <a:endParaRPr lang="ko-KR" altLang="en-US"/>
           </a:p>
@@ -2305,7 +2307,7 @@
           <a:p>
             <a:fld id="{1BE5052F-5850-43E1-B7E1-93792622382B}" type="datetimeFigureOut">
               <a:rPr lang="ko-KR" altLang="en-US" smtClean="0"/>
-              <a:t>2025-06-15</a:t>
+              <a:t>2025-06-16</a:t>
             </a:fld>
             <a:endParaRPr lang="ko-KR" altLang="en-US"/>
           </a:p>
@@ -2616,7 +2618,7 @@
           <a:p>
             <a:fld id="{1BE5052F-5850-43E1-B7E1-93792622382B}" type="datetimeFigureOut">
               <a:rPr lang="ko-KR" altLang="en-US" smtClean="0"/>
-              <a:t>2025-06-15</a:t>
+              <a:t>2025-06-16</a:t>
             </a:fld>
             <a:endParaRPr lang="ko-KR" altLang="en-US"/>
           </a:p>
@@ -2904,7 +2906,7 @@
           <a:p>
             <a:fld id="{1BE5052F-5850-43E1-B7E1-93792622382B}" type="datetimeFigureOut">
               <a:rPr lang="ko-KR" altLang="en-US" smtClean="0"/>
-              <a:t>2025-06-15</a:t>
+              <a:t>2025-06-16</a:t>
             </a:fld>
             <a:endParaRPr lang="ko-KR" altLang="en-US"/>
           </a:p>
@@ -3151,7 +3153,7 @@
           <a:p>
             <a:fld id="{1BE5052F-5850-43E1-B7E1-93792622382B}" type="datetimeFigureOut">
               <a:rPr lang="ko-KR" altLang="en-US" smtClean="0"/>
-              <a:t>2025-06-15</a:t>
+              <a:t>2025-06-16</a:t>
             </a:fld>
             <a:endParaRPr lang="ko-KR" altLang="en-US"/>
           </a:p>
@@ -3657,13 +3659,7 @@
       </p:grpSpPr>
       <p:sp>
         <p:nvSpPr>
-          <p:cNvPr id="2" name="제목 1">
-            <a:extLst>
-              <a:ext uri="{FF2B5EF4-FFF2-40B4-BE49-F238E27FC236}">
-                <a16:creationId xmlns:a16="http://schemas.microsoft.com/office/drawing/2014/main" id="{ACBE0C55-C839-3F3B-6780-42ED096B4F6C}"/>
-              </a:ext>
-            </a:extLst>
-          </p:cNvPr>
+          <p:cNvPr id="2" name="제목 1"/>
           <p:cNvSpPr>
             <a:spLocks noGrp="1"/>
           </p:cNvSpPr>
@@ -3682,13 +3678,7 @@
       </p:sp>
       <p:sp>
         <p:nvSpPr>
-          <p:cNvPr id="3" name="내용 개체 틀 2">
-            <a:extLst>
-              <a:ext uri="{FF2B5EF4-FFF2-40B4-BE49-F238E27FC236}">
-                <a16:creationId xmlns:a16="http://schemas.microsoft.com/office/drawing/2014/main" id="{478047E4-7966-A210-AEDE-096ECF233CD0}"/>
-              </a:ext>
-            </a:extLst>
-          </p:cNvPr>
+          <p:cNvPr id="3" name="내용 개체 틀 2"/>
           <p:cNvSpPr>
             <a:spLocks noGrp="1"/>
           </p:cNvSpPr>
@@ -3701,20 +3691,27 @@
           <a:bodyPr/>
           <a:lstStyle/>
           <a:p>
-            <a:endParaRPr lang="ko-KR" altLang="en-US" dirty="0"/>
+            <a:endParaRPr lang="ko-KR" altLang="en-US"/>
           </a:p>
         </p:txBody>
       </p:sp>
     </p:spTree>
     <p:extLst>
       <p:ext uri="{BB962C8B-B14F-4D97-AF65-F5344CB8AC3E}">
-        <p14:creationId xmlns:p14="http://schemas.microsoft.com/office/powerpoint/2010/main" val="2896865712"/>
+        <p14:creationId xmlns:p14="http://schemas.microsoft.com/office/powerpoint/2010/main" val="3869291741"/>
       </p:ext>
     </p:extLst>
   </p:cSld>
   <p:clrMapOvr>
     <a:masterClrMapping/>
   </p:clrMapOvr>
+  <p:timing>
+    <p:tnLst>
+      <p:par>
+        <p:cTn id="1" dur="indefinite" restart="never" nodeType="tmRoot"/>
+      </p:par>
+    </p:tnLst>
+  </p:timing>
 </p:sld>
 </file>
 
@@ -3740,7 +3737,7 @@
           <p:cNvPr id="2" name="제목 1">
             <a:extLst>
               <a:ext uri="{FF2B5EF4-FFF2-40B4-BE49-F238E27FC236}">
-                <a16:creationId xmlns:a16="http://schemas.microsoft.com/office/drawing/2014/main" id="{9DB3A6D4-9EA6-7BF5-5FB5-77B5EA12BA46}"/>
+                <a16:creationId xmlns:a16="http://schemas.microsoft.com/office/drawing/2014/main" id="{42287D37-4C3C-6EBA-08D5-67FCB5F7FA17}"/>
               </a:ext>
             </a:extLst>
           </p:cNvPr>
@@ -3758,10 +3755,10 @@
           <a:p>
             <a:r>
               <a:rPr lang="en-US" altLang="ko-KR" dirty="0"/>
-              <a:t>CMOS NOR </a:t>
-            </a:r>
-            <a:r>
-              <a:rPr lang="ko-KR" altLang="en-US"/>
+              <a:t>CMOS XOR </a:t>
+            </a:r>
+            <a:r>
+              <a:rPr lang="ko-KR" altLang="en-US" dirty="0"/>
               <a:t>게이트의 회로도</a:t>
             </a:r>
           </a:p>
@@ -3772,7 +3769,7 @@
           <p:cNvPr id="4" name="내용 개체 틀 3">
             <a:extLst>
               <a:ext uri="{FF2B5EF4-FFF2-40B4-BE49-F238E27FC236}">
-                <a16:creationId xmlns:a16="http://schemas.microsoft.com/office/drawing/2014/main" id="{F9727419-BBC0-A84B-6631-3E064817838C}"/>
+                <a16:creationId xmlns:a16="http://schemas.microsoft.com/office/drawing/2014/main" id="{91B52781-7060-F1FA-72BA-7D7AA38A06C9}"/>
               </a:ext>
             </a:extLst>
           </p:cNvPr>
@@ -3791,8 +3788,8 @@
         </p:blipFill>
         <p:spPr>
           <a:xfrm>
-            <a:off x="838200" y="2027016"/>
-            <a:ext cx="10515600" cy="3810532"/>
+            <a:off x="838200" y="1893863"/>
+            <a:ext cx="10515600" cy="4351338"/>
           </a:xfrm>
           <a:prstGeom prst="rect">
             <a:avLst/>
@@ -3802,7 +3799,7 @@
     </p:spTree>
     <p:extLst>
       <p:ext uri="{BB962C8B-B14F-4D97-AF65-F5344CB8AC3E}">
-        <p14:creationId xmlns:p14="http://schemas.microsoft.com/office/powerpoint/2010/main" val="3295788102"/>
+        <p14:creationId xmlns:p14="http://schemas.microsoft.com/office/powerpoint/2010/main" val="4182242256"/>
       </p:ext>
     </p:extLst>
   </p:cSld>
@@ -3859,8 +3856,16 @@
               <a:t>게이트의 </a:t>
             </a:r>
             <a:r>
-              <a:rPr lang="ko-KR" altLang="en-US"/>
-              <a:t>논리회로와 회로도</a:t>
+              <a:rPr lang="ko-KR" altLang="en-US" dirty="0" err="1" smtClean="0"/>
+              <a:t>진리표와</a:t>
+            </a:r>
+            <a:r>
+              <a:rPr lang="ko-KR" altLang="en-US" dirty="0" smtClean="0"/>
+              <a:t> </a:t>
+            </a:r>
+            <a:r>
+              <a:rPr lang="ko-KR" altLang="en-US" dirty="0"/>
+              <a:t>회로도</a:t>
             </a:r>
           </a:p>
         </p:txBody>
@@ -3932,7 +3937,7 @@
           <p:cNvPr id="2" name="제목 1">
             <a:extLst>
               <a:ext uri="{FF2B5EF4-FFF2-40B4-BE49-F238E27FC236}">
-                <a16:creationId xmlns:a16="http://schemas.microsoft.com/office/drawing/2014/main" id="{42287D37-4C3C-6EBA-08D5-67FCB5F7FA17}"/>
+                <a16:creationId xmlns:a16="http://schemas.microsoft.com/office/drawing/2014/main" id="{ACBE0C55-C839-3F3B-6780-42ED096B4F6C}"/>
               </a:ext>
             </a:extLst>
           </p:cNvPr>
@@ -3950,30 +3955,111 @@
           <a:p>
             <a:r>
               <a:rPr lang="en-US" altLang="ko-KR" dirty="0"/>
-              <a:t>CMOS XOR </a:t>
+              <a:t>CMOS NAND </a:t>
             </a:r>
             <a:r>
               <a:rPr lang="ko-KR" altLang="en-US" dirty="0"/>
               <a:t>게이트의 회로도</a:t>
             </a:r>
+            <a:endParaRPr lang="ko-KR" altLang="en-US" dirty="0"/>
+          </a:p>
+        </p:txBody>
+      </p:sp>
+      <p:sp>
+        <p:nvSpPr>
+          <p:cNvPr id="3" name="내용 개체 틀 2">
+            <a:extLst>
+              <a:ext uri="{FF2B5EF4-FFF2-40B4-BE49-F238E27FC236}">
+                <a16:creationId xmlns:a16="http://schemas.microsoft.com/office/drawing/2014/main" id="{478047E4-7966-A210-AEDE-096ECF233CD0}"/>
+              </a:ext>
+            </a:extLst>
+          </p:cNvPr>
+          <p:cNvSpPr>
+            <a:spLocks noGrp="1"/>
+          </p:cNvSpPr>
+          <p:nvPr>
+            <p:ph idx="1"/>
+          </p:nvPr>
+        </p:nvSpPr>
+        <p:spPr/>
+        <p:txBody>
+          <a:bodyPr/>
+          <a:lstStyle/>
+          <a:p>
+            <a:r>
+              <a:rPr lang="en-US" altLang="ko-KR" dirty="0"/>
+              <a:t>B=0 </a:t>
+            </a:r>
+            <a:r>
+              <a:rPr lang="ko-KR" altLang="en-US" dirty="0"/>
+              <a:t>→ </a:t>
+            </a:r>
+            <a:r>
+              <a:rPr lang="en-US" altLang="ko-KR" dirty="0"/>
+              <a:t>PASS TR </a:t>
+            </a:r>
+            <a:r>
+              <a:rPr lang="ko-KR" altLang="en-US" dirty="0"/>
+              <a:t>활성화 →</a:t>
+            </a:r>
+            <a:r>
+              <a:rPr lang="en-US" altLang="ko-KR" dirty="0"/>
+              <a:t>A</a:t>
+            </a:r>
+            <a:r>
+              <a:rPr lang="ko-KR" altLang="en-US" dirty="0"/>
+              <a:t>에 의해서 결정</a:t>
+            </a:r>
+            <a:endParaRPr lang="en-US" altLang="ko-KR" dirty="0"/>
+          </a:p>
+          <a:p>
+            <a:r>
+              <a:rPr lang="en-US" altLang="ko-KR" dirty="0"/>
+              <a:t>B=1 </a:t>
+            </a:r>
+            <a:r>
+              <a:rPr lang="ko-KR" altLang="en-US" dirty="0"/>
+              <a:t>→ </a:t>
+            </a:r>
+            <a:r>
+              <a:rPr lang="ko-KR" altLang="en-US" dirty="0" err="1"/>
+              <a:t>앞단</a:t>
+            </a:r>
+            <a:r>
+              <a:rPr lang="ko-KR" altLang="en-US" dirty="0"/>
+              <a:t> </a:t>
+            </a:r>
+            <a:r>
+              <a:rPr lang="en-US" altLang="ko-KR" dirty="0"/>
+              <a:t>NOT </a:t>
+            </a:r>
+            <a:r>
+              <a:rPr lang="ko-KR" altLang="en-US" dirty="0"/>
+              <a:t>활성화 → </a:t>
+            </a:r>
+            <a:r>
+              <a:rPr lang="en-US" altLang="ko-KR" dirty="0"/>
+              <a:t>NOT</a:t>
+            </a:r>
+            <a:r>
+              <a:rPr lang="ko-KR" altLang="en-US" dirty="0"/>
+              <a:t>의 결과에 의해 </a:t>
+            </a:r>
+            <a:r>
+              <a:rPr lang="ko-KR" altLang="en-US" dirty="0" smtClean="0"/>
+              <a:t>결정</a:t>
+            </a:r>
+            <a:endParaRPr lang="ko-KR" altLang="en-US" dirty="0"/>
           </a:p>
         </p:txBody>
       </p:sp>
       <p:pic>
         <p:nvPicPr>
-          <p:cNvPr id="4" name="내용 개체 틀 3">
-            <a:extLst>
-              <a:ext uri="{FF2B5EF4-FFF2-40B4-BE49-F238E27FC236}">
-                <a16:creationId xmlns:a16="http://schemas.microsoft.com/office/drawing/2014/main" id="{91B52781-7060-F1FA-72BA-7D7AA38A06C9}"/>
-              </a:ext>
-            </a:extLst>
-          </p:cNvPr>
+          <p:cNvPr id="4" name="그림 3"/>
           <p:cNvPicPr>
-            <a:picLocks noGrp="1" noChangeAspect="1"/>
+            <a:picLocks noChangeAspect="1"/>
           </p:cNvPicPr>
-          <p:nvPr>
-            <p:ph idx="1"/>
-          </p:nvPr>
+          <p:nvPr/>
         </p:nvPicPr>
         <p:blipFill>
           <a:blip r:embed="rId2"/>
@@ -3983,8 +4069,8 @@
         </p:blipFill>
         <p:spPr>
           <a:xfrm>
-            <a:off x="838200" y="1893863"/>
-            <a:ext cx="10515600" cy="4351338"/>
+            <a:off x="838200" y="3023054"/>
+            <a:ext cx="10515600" cy="2929542"/>
           </a:xfrm>
           <a:prstGeom prst="rect">
             <a:avLst/>
@@ -3994,7 +4080,228 @@
     </p:spTree>
     <p:extLst>
       <p:ext uri="{BB962C8B-B14F-4D97-AF65-F5344CB8AC3E}">
-        <p14:creationId xmlns:p14="http://schemas.microsoft.com/office/powerpoint/2010/main" val="4182242256"/>
+        <p14:creationId xmlns:p14="http://schemas.microsoft.com/office/powerpoint/2010/main" val="2896865712"/>
+      </p:ext>
+    </p:extLst>
+  </p:cSld>
+  <p:clrMapOvr>
+    <a:masterClrMapping/>
+  </p:clrMapOvr>
+</p:sld>
+</file>
+
+<file path=ppt/slides/slide6.xml><?xml version="1.0" encoding="utf-8"?>
+<p:sld xmlns:a="http://schemas.openxmlformats.org/drawingml/2006/main" xmlns:r="http://schemas.openxmlformats.org/officeDocument/2006/relationships" xmlns:p="http://schemas.openxmlformats.org/presentationml/2006/main">
+  <p:cSld>
+    <p:spTree>
+      <p:nvGrpSpPr>
+        <p:cNvPr id="1" name=""/>
+        <p:cNvGrpSpPr/>
+        <p:nvPr/>
+      </p:nvGrpSpPr>
+      <p:grpSpPr>
+        <a:xfrm>
+          <a:off x="0" y="0"/>
+          <a:ext cx="0" cy="0"/>
+          <a:chOff x="0" y="0"/>
+          <a:chExt cx="0" cy="0"/>
+        </a:xfrm>
+      </p:grpSpPr>
+      <p:sp>
+        <p:nvSpPr>
+          <p:cNvPr id="2" name="제목 1"/>
+          <p:cNvSpPr>
+            <a:spLocks noGrp="1"/>
+          </p:cNvSpPr>
+          <p:nvPr>
+            <p:ph type="title"/>
+          </p:nvPr>
+        </p:nvSpPr>
+        <p:spPr/>
+        <p:txBody>
+          <a:bodyPr/>
+          <a:lstStyle/>
+          <a:p>
+            <a:r>
+              <a:rPr lang="en-US" altLang="ko-KR" dirty="0"/>
+              <a:t>CMOS NAND </a:t>
+            </a:r>
+            <a:r>
+              <a:rPr lang="ko-KR" altLang="en-US" dirty="0" smtClean="0"/>
+              <a:t>게이트의 </a:t>
+            </a:r>
+            <a:r>
+              <a:rPr lang="ko-KR" altLang="en-US" dirty="0" err="1" smtClean="0"/>
+              <a:t>진리표</a:t>
+            </a:r>
+            <a:r>
+              <a:rPr lang="ko-KR" altLang="en-US" dirty="0" smtClean="0"/>
+              <a:t>　</a:t>
+            </a:r>
+            <a:endParaRPr lang="ko-KR" altLang="en-US" dirty="0"/>
+          </a:p>
+        </p:txBody>
+      </p:sp>
+      <p:sp>
+        <p:nvSpPr>
+          <p:cNvPr id="5" name="내용 개체 틀 4"/>
+          <p:cNvSpPr>
+            <a:spLocks noGrp="1"/>
+          </p:cNvSpPr>
+          <p:nvPr>
+            <p:ph idx="1"/>
+          </p:nvPr>
+        </p:nvSpPr>
+        <p:spPr/>
+        <p:txBody>
+          <a:bodyPr/>
+          <a:lstStyle/>
+          <a:p>
+            <a:endParaRPr lang="ko-KR" altLang="en-US" dirty="0"/>
+          </a:p>
+        </p:txBody>
+      </p:sp>
+      <p:pic>
+        <p:nvPicPr>
+          <p:cNvPr id="6" name="내용 개체 틀 3"/>
+          <p:cNvPicPr>
+            <a:picLocks noChangeAspect="1"/>
+          </p:cNvPicPr>
+          <p:nvPr/>
+        </p:nvPicPr>
+        <p:blipFill rotWithShape="1">
+          <a:blip r:embed="rId2"/>
+          <a:srcRect t="-495" r="21406" b="-1"/>
+          <a:stretch/>
+        </p:blipFill>
+        <p:spPr>
+          <a:xfrm>
+            <a:off x="838200" y="1669143"/>
+            <a:ext cx="10515599" cy="4372883"/>
+          </a:xfrm>
+          <a:prstGeom prst="rect">
+            <a:avLst/>
+          </a:prstGeom>
+        </p:spPr>
+      </p:pic>
+    </p:spTree>
+    <p:extLst>
+      <p:ext uri="{BB962C8B-B14F-4D97-AF65-F5344CB8AC3E}">
+        <p14:creationId xmlns:p14="http://schemas.microsoft.com/office/powerpoint/2010/main" val="381445576"/>
+      </p:ext>
+    </p:extLst>
+  </p:cSld>
+  <p:clrMapOvr>
+    <a:masterClrMapping/>
+  </p:clrMapOvr>
+  <p:timing>
+    <p:tnLst>
+      <p:par>
+        <p:cTn id="1" dur="indefinite" restart="never" nodeType="tmRoot"/>
+      </p:par>
+    </p:tnLst>
+  </p:timing>
+</p:sld>
+</file>
+
+<file path=ppt/slides/slide7.xml><?xml version="1.0" encoding="utf-8"?>
+<p:sld xmlns:a="http://schemas.openxmlformats.org/drawingml/2006/main" xmlns:r="http://schemas.openxmlformats.org/officeDocument/2006/relationships" xmlns:p="http://schemas.openxmlformats.org/presentationml/2006/main">
+  <p:cSld>
+    <p:spTree>
+      <p:nvGrpSpPr>
+        <p:cNvPr id="1" name=""/>
+        <p:cNvGrpSpPr/>
+        <p:nvPr/>
+      </p:nvGrpSpPr>
+      <p:grpSpPr>
+        <a:xfrm>
+          <a:off x="0" y="0"/>
+          <a:ext cx="0" cy="0"/>
+          <a:chOff x="0" y="0"/>
+          <a:chExt cx="0" cy="0"/>
+        </a:xfrm>
+      </p:grpSpPr>
+      <p:sp>
+        <p:nvSpPr>
+          <p:cNvPr id="2" name="제목 1">
+            <a:extLst>
+              <a:ext uri="{FF2B5EF4-FFF2-40B4-BE49-F238E27FC236}">
+                <a16:creationId xmlns:a16="http://schemas.microsoft.com/office/drawing/2014/main" id="{9DB3A6D4-9EA6-7BF5-5FB5-77B5EA12BA46}"/>
+              </a:ext>
+            </a:extLst>
+          </p:cNvPr>
+          <p:cNvSpPr>
+            <a:spLocks noGrp="1"/>
+          </p:cNvSpPr>
+          <p:nvPr>
+            <p:ph type="title"/>
+          </p:nvPr>
+        </p:nvSpPr>
+        <p:spPr/>
+        <p:txBody>
+          <a:bodyPr/>
+          <a:lstStyle/>
+          <a:p>
+            <a:r>
+              <a:rPr lang="ko-KR" altLang="en-US" dirty="0" smtClean="0"/>
+              <a:t>ＣＭＯＳ</a:t>
+            </a:r>
+            <a:r>
+              <a:rPr lang="en-US" altLang="ko-KR" dirty="0" smtClean="0"/>
+              <a:t> </a:t>
+            </a:r>
+            <a:r>
+              <a:rPr lang="ko-KR" altLang="en-US" dirty="0"/>
+              <a:t>게이트의 </a:t>
+            </a:r>
+            <a:r>
+              <a:rPr lang="ko-KR" altLang="en-US" dirty="0" err="1"/>
+              <a:t>진리표와</a:t>
+            </a:r>
+            <a:r>
+              <a:rPr lang="ko-KR" altLang="en-US" dirty="0"/>
+              <a:t> 회로도</a:t>
+            </a:r>
+            <a:endParaRPr lang="ko-KR" altLang="en-US" dirty="0"/>
+          </a:p>
+        </p:txBody>
+      </p:sp>
+      <p:pic>
+        <p:nvPicPr>
+          <p:cNvPr id="4" name="내용 개체 틀 3">
+            <a:extLst>
+              <a:ext uri="{FF2B5EF4-FFF2-40B4-BE49-F238E27FC236}">
+                <a16:creationId xmlns:a16="http://schemas.microsoft.com/office/drawing/2014/main" id="{F9727419-BBC0-A84B-6631-3E064817838C}"/>
+              </a:ext>
+            </a:extLst>
+          </p:cNvPr>
+          <p:cNvPicPr>
+            <a:picLocks noGrp="1" noChangeAspect="1"/>
+          </p:cNvPicPr>
+          <p:nvPr>
+            <p:ph idx="1"/>
+          </p:nvPr>
+        </p:nvPicPr>
+        <p:blipFill>
+          <a:blip r:embed="rId2"/>
+          <a:stretch>
+            <a:fillRect/>
+          </a:stretch>
+        </p:blipFill>
+        <p:spPr>
+          <a:xfrm>
+            <a:off x="838200" y="2027016"/>
+            <a:ext cx="10515600" cy="3810532"/>
+          </a:xfrm>
+          <a:prstGeom prst="rect">
+            <a:avLst/>
+          </a:prstGeom>
+        </p:spPr>
+      </p:pic>
+    </p:spTree>
+    <p:extLst>
+      <p:ext uri="{BB962C8B-B14F-4D97-AF65-F5344CB8AC3E}">
+        <p14:creationId xmlns:p14="http://schemas.microsoft.com/office/powerpoint/2010/main" val="3295788102"/>
       </p:ext>
     </p:extLst>
   </p:cSld>

--- a/VLSI design 설계 실습/2025-05-29.pptx
+++ b/VLSI design 설계 실습/2025-05-29.pptx
@@ -3705,13 +3705,6 @@
   <p:clrMapOvr>
     <a:masterClrMapping/>
   </p:clrMapOvr>
-  <p:timing>
-    <p:tnLst>
-      <p:par>
-        <p:cTn id="1" dur="indefinite" restart="never" nodeType="tmRoot"/>
-      </p:par>
-    </p:tnLst>
-  </p:timing>
 </p:sld>
 </file>
 
@@ -3856,16 +3849,12 @@
               <a:t>게이트의 </a:t>
             </a:r>
             <a:r>
-              <a:rPr lang="ko-KR" altLang="en-US" dirty="0" err="1" smtClean="0"/>
+              <a:rPr lang="ko-KR" altLang="en-US" dirty="0" err="1"/>
               <a:t>진리표와</a:t>
             </a:r>
             <a:r>
-              <a:rPr lang="ko-KR" altLang="en-US" dirty="0" smtClean="0"/>
-              <a:t> </a:t>
-            </a:r>
-            <a:r>
               <a:rPr lang="ko-KR" altLang="en-US" dirty="0"/>
-              <a:t>회로도</a:t>
+              <a:t> 회로도</a:t>
             </a:r>
           </a:p>
         </p:txBody>
@@ -3961,7 +3950,6 @@
               <a:rPr lang="ko-KR" altLang="en-US" dirty="0"/>
               <a:t>게이트의 회로도</a:t>
             </a:r>
-            <a:endParaRPr lang="ko-KR" altLang="en-US" dirty="0"/>
           </a:p>
         </p:txBody>
       </p:sp>
@@ -4043,13 +4031,8 @@
             </a:r>
             <a:r>
               <a:rPr lang="ko-KR" altLang="en-US" dirty="0"/>
-              <a:t>의 결과에 의해 </a:t>
-            </a:r>
-            <a:r>
-              <a:rPr lang="ko-KR" altLang="en-US" dirty="0" smtClean="0"/>
-              <a:t>결정</a:t>
-            </a:r>
-            <a:endParaRPr lang="ko-KR" altLang="en-US" dirty="0"/>
+              <a:t>의 결과에 의해 결정</a:t>
+            </a:r>
           </a:p>
         </p:txBody>
       </p:sp>
@@ -4127,18 +4110,17 @@
               <a:t>CMOS NAND </a:t>
             </a:r>
             <a:r>
-              <a:rPr lang="ko-KR" altLang="en-US" dirty="0" smtClean="0"/>
+              <a:rPr lang="ko-KR" altLang="en-US" dirty="0"/>
               <a:t>게이트의 </a:t>
             </a:r>
             <a:r>
-              <a:rPr lang="ko-KR" altLang="en-US" dirty="0" err="1" smtClean="0"/>
+              <a:rPr lang="ko-KR" altLang="en-US" dirty="0" err="1"/>
               <a:t>진리표</a:t>
             </a:r>
             <a:r>
-              <a:rPr lang="ko-KR" altLang="en-US" dirty="0" smtClean="0"/>
+              <a:rPr lang="ko-KR" altLang="en-US" dirty="0"/>
               <a:t>　</a:t>
             </a:r>
-            <a:endParaRPr lang="ko-KR" altLang="en-US" dirty="0"/>
           </a:p>
         </p:txBody>
       </p:sp>
@@ -4194,13 +4176,6 @@
   <p:clrMapOvr>
     <a:masterClrMapping/>
   </p:clrMapOvr>
-  <p:timing>
-    <p:tnLst>
-      <p:par>
-        <p:cTn id="1" dur="indefinite" restart="never" nodeType="tmRoot"/>
-      </p:par>
-    </p:tnLst>
-  </p:timing>
 </p:sld>
 </file>
 
@@ -4243,12 +4218,8 @@
           <a:lstStyle/>
           <a:p>
             <a:r>
-              <a:rPr lang="ko-KR" altLang="en-US" dirty="0" smtClean="0"/>
-              <a:t>ＣＭＯＳ</a:t>
-            </a:r>
-            <a:r>
-              <a:rPr lang="en-US" altLang="ko-KR" dirty="0" smtClean="0"/>
-              <a:t> </a:t>
+              <a:rPr lang="en-US" altLang="ko-KR"/>
+              <a:t>CMOS </a:t>
             </a:r>
             <a:r>
               <a:rPr lang="ko-KR" altLang="en-US" dirty="0"/>
@@ -4262,7 +4233,6 @@
               <a:rPr lang="ko-KR" altLang="en-US" dirty="0"/>
               <a:t> 회로도</a:t>
             </a:r>
-            <a:endParaRPr lang="ko-KR" altLang="en-US" dirty="0"/>
           </a:p>
         </p:txBody>
       </p:sp>

--- a/VLSI design 설계 실습/2025-05-29.pptx
+++ b/VLSI design 설계 실습/2025-05-29.pptx
@@ -6,12 +6,15 @@
   </p:sldMasterIdLst>
   <p:sldIdLst>
     <p:sldId id="256" r:id="rId2"/>
-    <p:sldId id="262" r:id="rId3"/>
-    <p:sldId id="258" r:id="rId4"/>
-    <p:sldId id="260" r:id="rId5"/>
-    <p:sldId id="257" r:id="rId6"/>
-    <p:sldId id="261" r:id="rId7"/>
-    <p:sldId id="259" r:id="rId8"/>
+    <p:sldId id="258" r:id="rId3"/>
+    <p:sldId id="260" r:id="rId4"/>
+    <p:sldId id="257" r:id="rId5"/>
+    <p:sldId id="261" r:id="rId6"/>
+    <p:sldId id="259" r:id="rId7"/>
+    <p:sldId id="262" r:id="rId8"/>
+    <p:sldId id="263" r:id="rId9"/>
+    <p:sldId id="264" r:id="rId10"/>
+    <p:sldId id="265" r:id="rId11"/>
   </p:sldIdLst>
   <p:sldSz cx="12192000" cy="6858000"/>
   <p:notesSz cx="6858000" cy="9144000"/>
@@ -497,7 +500,7 @@
           <a:p>
             <a:fld id="{1BE5052F-5850-43E1-B7E1-93792622382B}" type="datetimeFigureOut">
               <a:rPr lang="ko-KR" altLang="en-US" smtClean="0"/>
-              <a:t>2025-06-16</a:t>
+              <a:t>2025-06-17</a:t>
             </a:fld>
             <a:endParaRPr lang="ko-KR" altLang="en-US"/>
           </a:p>
@@ -695,7 +698,7 @@
           <a:p>
             <a:fld id="{1BE5052F-5850-43E1-B7E1-93792622382B}" type="datetimeFigureOut">
               <a:rPr lang="ko-KR" altLang="en-US" smtClean="0"/>
-              <a:t>2025-06-16</a:t>
+              <a:t>2025-06-17</a:t>
             </a:fld>
             <a:endParaRPr lang="ko-KR" altLang="en-US"/>
           </a:p>
@@ -903,7 +906,7 @@
           <a:p>
             <a:fld id="{1BE5052F-5850-43E1-B7E1-93792622382B}" type="datetimeFigureOut">
               <a:rPr lang="ko-KR" altLang="en-US" smtClean="0"/>
-              <a:t>2025-06-16</a:t>
+              <a:t>2025-06-17</a:t>
             </a:fld>
             <a:endParaRPr lang="ko-KR" altLang="en-US"/>
           </a:p>
@@ -1101,7 +1104,7 @@
           <a:p>
             <a:fld id="{1BE5052F-5850-43E1-B7E1-93792622382B}" type="datetimeFigureOut">
               <a:rPr lang="ko-KR" altLang="en-US" smtClean="0"/>
-              <a:t>2025-06-16</a:t>
+              <a:t>2025-06-17</a:t>
             </a:fld>
             <a:endParaRPr lang="ko-KR" altLang="en-US"/>
           </a:p>
@@ -1376,7 +1379,7 @@
           <a:p>
             <a:fld id="{1BE5052F-5850-43E1-B7E1-93792622382B}" type="datetimeFigureOut">
               <a:rPr lang="ko-KR" altLang="en-US" smtClean="0"/>
-              <a:t>2025-06-16</a:t>
+              <a:t>2025-06-17</a:t>
             </a:fld>
             <a:endParaRPr lang="ko-KR" altLang="en-US"/>
           </a:p>
@@ -1641,7 +1644,7 @@
           <a:p>
             <a:fld id="{1BE5052F-5850-43E1-B7E1-93792622382B}" type="datetimeFigureOut">
               <a:rPr lang="ko-KR" altLang="en-US" smtClean="0"/>
-              <a:t>2025-06-16</a:t>
+              <a:t>2025-06-17</a:t>
             </a:fld>
             <a:endParaRPr lang="ko-KR" altLang="en-US"/>
           </a:p>
@@ -2053,7 +2056,7 @@
           <a:p>
             <a:fld id="{1BE5052F-5850-43E1-B7E1-93792622382B}" type="datetimeFigureOut">
               <a:rPr lang="ko-KR" altLang="en-US" smtClean="0"/>
-              <a:t>2025-06-16</a:t>
+              <a:t>2025-06-17</a:t>
             </a:fld>
             <a:endParaRPr lang="ko-KR" altLang="en-US"/>
           </a:p>
@@ -2194,7 +2197,7 @@
           <a:p>
             <a:fld id="{1BE5052F-5850-43E1-B7E1-93792622382B}" type="datetimeFigureOut">
               <a:rPr lang="ko-KR" altLang="en-US" smtClean="0"/>
-              <a:t>2025-06-16</a:t>
+              <a:t>2025-06-17</a:t>
             </a:fld>
             <a:endParaRPr lang="ko-KR" altLang="en-US"/>
           </a:p>
@@ -2307,7 +2310,7 @@
           <a:p>
             <a:fld id="{1BE5052F-5850-43E1-B7E1-93792622382B}" type="datetimeFigureOut">
               <a:rPr lang="ko-KR" altLang="en-US" smtClean="0"/>
-              <a:t>2025-06-16</a:t>
+              <a:t>2025-06-17</a:t>
             </a:fld>
             <a:endParaRPr lang="ko-KR" altLang="en-US"/>
           </a:p>
@@ -2618,7 +2621,7 @@
           <a:p>
             <a:fld id="{1BE5052F-5850-43E1-B7E1-93792622382B}" type="datetimeFigureOut">
               <a:rPr lang="ko-KR" altLang="en-US" smtClean="0"/>
-              <a:t>2025-06-16</a:t>
+              <a:t>2025-06-17</a:t>
             </a:fld>
             <a:endParaRPr lang="ko-KR" altLang="en-US"/>
           </a:p>
@@ -2906,7 +2909,7 @@
           <a:p>
             <a:fld id="{1BE5052F-5850-43E1-B7E1-93792622382B}" type="datetimeFigureOut">
               <a:rPr lang="ko-KR" altLang="en-US" smtClean="0"/>
-              <a:t>2025-06-16</a:t>
+              <a:t>2025-06-17</a:t>
             </a:fld>
             <a:endParaRPr lang="ko-KR" altLang="en-US"/>
           </a:p>
@@ -3153,7 +3156,7 @@
           <a:p>
             <a:fld id="{1BE5052F-5850-43E1-B7E1-93792622382B}" type="datetimeFigureOut">
               <a:rPr lang="ko-KR" altLang="en-US" smtClean="0"/>
-              <a:t>2025-06-16</a:t>
+              <a:t>2025-06-17</a:t>
             </a:fld>
             <a:endParaRPr lang="ko-KR" altLang="en-US"/>
           </a:p>
@@ -3640,7 +3643,7 @@
 </p:sld>
 </file>
 
-<file path=ppt/slides/slide2.xml><?xml version="1.0" encoding="utf-8"?>
+<file path=ppt/slides/slide10.xml><?xml version="1.0" encoding="utf-8"?>
 <p:sld xmlns:a="http://schemas.openxmlformats.org/drawingml/2006/main" xmlns:r="http://schemas.openxmlformats.org/officeDocument/2006/relationships" xmlns:p="http://schemas.openxmlformats.org/presentationml/2006/main">
   <p:cSld>
     <p:spTree>
@@ -3698,7 +3701,7 @@
     </p:spTree>
     <p:extLst>
       <p:ext uri="{BB962C8B-B14F-4D97-AF65-F5344CB8AC3E}">
-        <p14:creationId xmlns:p14="http://schemas.microsoft.com/office/powerpoint/2010/main" val="3869291741"/>
+        <p14:creationId xmlns:p14="http://schemas.microsoft.com/office/powerpoint/2010/main" val="2769984220"/>
       </p:ext>
     </p:extLst>
   </p:cSld>
@@ -3708,7 +3711,7 @@
 </p:sld>
 </file>
 
-<file path=ppt/slides/slide3.xml><?xml version="1.0" encoding="utf-8"?>
+<file path=ppt/slides/slide2.xml><?xml version="1.0" encoding="utf-8"?>
 <p:sld xmlns:a="http://schemas.openxmlformats.org/drawingml/2006/main" xmlns:r="http://schemas.openxmlformats.org/officeDocument/2006/relationships" xmlns:p="http://schemas.openxmlformats.org/presentationml/2006/main">
   <p:cSld>
     <p:spTree>
@@ -3802,7 +3805,7 @@
 </p:sld>
 </file>
 
-<file path=ppt/slides/slide4.xml><?xml version="1.0" encoding="utf-8"?>
+<file path=ppt/slides/slide3.xml><?xml version="1.0" encoding="utf-8"?>
 <p:sld xmlns:a="http://schemas.openxmlformats.org/drawingml/2006/main" xmlns:r="http://schemas.openxmlformats.org/officeDocument/2006/relationships" xmlns:p="http://schemas.openxmlformats.org/presentationml/2006/main">
   <p:cSld>
     <p:spTree>
@@ -3904,7 +3907,7 @@
 </p:sld>
 </file>
 
-<file path=ppt/slides/slide5.xml><?xml version="1.0" encoding="utf-8"?>
+<file path=ppt/slides/slide4.xml><?xml version="1.0" encoding="utf-8"?>
 <p:sld xmlns:a="http://schemas.openxmlformats.org/drawingml/2006/main" xmlns:r="http://schemas.openxmlformats.org/officeDocument/2006/relationships" xmlns:p="http://schemas.openxmlformats.org/presentationml/2006/main">
   <p:cSld>
     <p:spTree>
@@ -4073,7 +4076,7 @@
 </p:sld>
 </file>
 
-<file path=ppt/slides/slide6.xml><?xml version="1.0" encoding="utf-8"?>
+<file path=ppt/slides/slide5.xml><?xml version="1.0" encoding="utf-8"?>
 <p:sld xmlns:a="http://schemas.openxmlformats.org/drawingml/2006/main" xmlns:r="http://schemas.openxmlformats.org/officeDocument/2006/relationships" xmlns:p="http://schemas.openxmlformats.org/presentationml/2006/main">
   <p:cSld>
     <p:spTree>
@@ -4179,7 +4182,7 @@
 </p:sld>
 </file>
 
-<file path=ppt/slides/slide7.xml><?xml version="1.0" encoding="utf-8"?>
+<file path=ppt/slides/slide6.xml><?xml version="1.0" encoding="utf-8"?>
 <p:sld xmlns:a="http://schemas.openxmlformats.org/drawingml/2006/main" xmlns:r="http://schemas.openxmlformats.org/officeDocument/2006/relationships" xmlns:p="http://schemas.openxmlformats.org/presentationml/2006/main">
   <p:cSld>
     <p:spTree>
@@ -4218,11 +4221,15 @@
           <a:lstStyle/>
           <a:p>
             <a:r>
-              <a:rPr lang="en-US" altLang="ko-KR"/>
+              <a:rPr lang="en-US" altLang="ko-KR" dirty="0"/>
               <a:t>CMOS </a:t>
             </a:r>
             <a:r>
-              <a:rPr lang="ko-KR" altLang="en-US" dirty="0"/>
+              <a:rPr lang="en-US" altLang="ko-KR" dirty="0" smtClean="0"/>
+              <a:t>NOR </a:t>
+            </a:r>
+            <a:r>
+              <a:rPr lang="ko-KR" altLang="en-US" dirty="0" smtClean="0"/>
               <a:t>게이트의 </a:t>
             </a:r>
             <a:r>
@@ -4272,6 +4279,268 @@
     <p:extLst>
       <p:ext uri="{BB962C8B-B14F-4D97-AF65-F5344CB8AC3E}">
         <p14:creationId xmlns:p14="http://schemas.microsoft.com/office/powerpoint/2010/main" val="3295788102"/>
+      </p:ext>
+    </p:extLst>
+  </p:cSld>
+  <p:clrMapOvr>
+    <a:masterClrMapping/>
+  </p:clrMapOvr>
+</p:sld>
+</file>
+
+<file path=ppt/slides/slide7.xml><?xml version="1.0" encoding="utf-8"?>
+<p:sld xmlns:a="http://schemas.openxmlformats.org/drawingml/2006/main" xmlns:r="http://schemas.openxmlformats.org/officeDocument/2006/relationships" xmlns:p="http://schemas.openxmlformats.org/presentationml/2006/main">
+  <p:cSld>
+    <p:spTree>
+      <p:nvGrpSpPr>
+        <p:cNvPr id="1" name=""/>
+        <p:cNvGrpSpPr/>
+        <p:nvPr/>
+      </p:nvGrpSpPr>
+      <p:grpSpPr>
+        <a:xfrm>
+          <a:off x="0" y="0"/>
+          <a:ext cx="0" cy="0"/>
+          <a:chOff x="0" y="0"/>
+          <a:chExt cx="0" cy="0"/>
+        </a:xfrm>
+      </p:grpSpPr>
+      <p:sp>
+        <p:nvSpPr>
+          <p:cNvPr id="2" name="제목 1"/>
+          <p:cNvSpPr>
+            <a:spLocks noGrp="1"/>
+          </p:cNvSpPr>
+          <p:nvPr>
+            <p:ph type="title"/>
+          </p:nvPr>
+        </p:nvSpPr>
+        <p:spPr/>
+        <p:txBody>
+          <a:bodyPr/>
+          <a:lstStyle/>
+          <a:p>
+            <a:r>
+              <a:rPr lang="en-US" altLang="ko-KR" dirty="0" smtClean="0"/>
+              <a:t>6</a:t>
+            </a:r>
+            <a:r>
+              <a:rPr lang="en-US" altLang="ko-KR" dirty="0" smtClean="0"/>
+              <a:t>_CNT_C</a:t>
+            </a:r>
+            <a:r>
+              <a:rPr lang="ko-KR" altLang="en-US" dirty="0" smtClean="0"/>
+              <a:t>의 회로도</a:t>
+            </a:r>
+            <a:endParaRPr lang="ko-KR" altLang="en-US" dirty="0"/>
+          </a:p>
+        </p:txBody>
+      </p:sp>
+      <p:pic>
+        <p:nvPicPr>
+          <p:cNvPr id="4" name="내용 개체 틀 3"/>
+          <p:cNvPicPr>
+            <a:picLocks noGrp="1" noChangeAspect="1"/>
+          </p:cNvPicPr>
+          <p:nvPr>
+            <p:ph idx="1"/>
+          </p:nvPr>
+        </p:nvPicPr>
+        <p:blipFill>
+          <a:blip r:embed="rId2"/>
+          <a:stretch>
+            <a:fillRect/>
+          </a:stretch>
+        </p:blipFill>
+        <p:spPr>
+          <a:xfrm>
+            <a:off x="838201" y="1690688"/>
+            <a:ext cx="5548086" cy="4351338"/>
+          </a:xfrm>
+          <a:prstGeom prst="rect">
+            <a:avLst/>
+          </a:prstGeom>
+        </p:spPr>
+      </p:pic>
+      <p:pic>
+        <p:nvPicPr>
+          <p:cNvPr id="5" name="그림 4"/>
+          <p:cNvPicPr>
+            <a:picLocks noChangeAspect="1"/>
+          </p:cNvPicPr>
+          <p:nvPr/>
+        </p:nvPicPr>
+        <p:blipFill>
+          <a:blip r:embed="rId3"/>
+          <a:stretch>
+            <a:fillRect/>
+          </a:stretch>
+        </p:blipFill>
+        <p:spPr>
+          <a:xfrm>
+            <a:off x="6662057" y="1690688"/>
+            <a:ext cx="4744112" cy="4351338"/>
+          </a:xfrm>
+          <a:prstGeom prst="rect">
+            <a:avLst/>
+          </a:prstGeom>
+        </p:spPr>
+      </p:pic>
+    </p:spTree>
+    <p:extLst>
+      <p:ext uri="{BB962C8B-B14F-4D97-AF65-F5344CB8AC3E}">
+        <p14:creationId xmlns:p14="http://schemas.microsoft.com/office/powerpoint/2010/main" val="3869291741"/>
+      </p:ext>
+    </p:extLst>
+  </p:cSld>
+  <p:clrMapOvr>
+    <a:masterClrMapping/>
+  </p:clrMapOvr>
+</p:sld>
+</file>
+
+<file path=ppt/slides/slide8.xml><?xml version="1.0" encoding="utf-8"?>
+<p:sld xmlns:a="http://schemas.openxmlformats.org/drawingml/2006/main" xmlns:r="http://schemas.openxmlformats.org/officeDocument/2006/relationships" xmlns:p="http://schemas.openxmlformats.org/presentationml/2006/main">
+  <p:cSld>
+    <p:spTree>
+      <p:nvGrpSpPr>
+        <p:cNvPr id="1" name=""/>
+        <p:cNvGrpSpPr/>
+        <p:nvPr/>
+      </p:nvGrpSpPr>
+      <p:grpSpPr>
+        <a:xfrm>
+          <a:off x="0" y="0"/>
+          <a:ext cx="0" cy="0"/>
+          <a:chOff x="0" y="0"/>
+          <a:chExt cx="0" cy="0"/>
+        </a:xfrm>
+      </p:grpSpPr>
+      <p:sp>
+        <p:nvSpPr>
+          <p:cNvPr id="2" name="제목 1"/>
+          <p:cNvSpPr>
+            <a:spLocks noGrp="1"/>
+          </p:cNvSpPr>
+          <p:nvPr>
+            <p:ph type="title"/>
+          </p:nvPr>
+        </p:nvSpPr>
+        <p:spPr/>
+        <p:txBody>
+          <a:bodyPr/>
+          <a:lstStyle/>
+          <a:p>
+            <a:endParaRPr lang="ko-KR" altLang="en-US"/>
+          </a:p>
+        </p:txBody>
+      </p:sp>
+      <p:sp>
+        <p:nvSpPr>
+          <p:cNvPr id="3" name="내용 개체 틀 2"/>
+          <p:cNvSpPr>
+            <a:spLocks noGrp="1"/>
+          </p:cNvSpPr>
+          <p:nvPr>
+            <p:ph idx="1"/>
+          </p:nvPr>
+        </p:nvSpPr>
+        <p:spPr/>
+        <p:txBody>
+          <a:bodyPr/>
+          <a:lstStyle/>
+          <a:p>
+            <a:endParaRPr lang="ko-KR" altLang="en-US"/>
+          </a:p>
+        </p:txBody>
+      </p:sp>
+    </p:spTree>
+    <p:extLst>
+      <p:ext uri="{BB962C8B-B14F-4D97-AF65-F5344CB8AC3E}">
+        <p14:creationId xmlns:p14="http://schemas.microsoft.com/office/powerpoint/2010/main" val="2587074797"/>
+      </p:ext>
+    </p:extLst>
+  </p:cSld>
+  <p:clrMapOvr>
+    <a:masterClrMapping/>
+  </p:clrMapOvr>
+</p:sld>
+</file>
+
+<file path=ppt/slides/slide9.xml><?xml version="1.0" encoding="utf-8"?>
+<p:sld xmlns:a="http://schemas.openxmlformats.org/drawingml/2006/main" xmlns:r="http://schemas.openxmlformats.org/officeDocument/2006/relationships" xmlns:p="http://schemas.openxmlformats.org/presentationml/2006/main">
+  <p:cSld>
+    <p:spTree>
+      <p:nvGrpSpPr>
+        <p:cNvPr id="1" name=""/>
+        <p:cNvGrpSpPr/>
+        <p:nvPr/>
+      </p:nvGrpSpPr>
+      <p:grpSpPr>
+        <a:xfrm>
+          <a:off x="0" y="0"/>
+          <a:ext cx="0" cy="0"/>
+          <a:chOff x="0" y="0"/>
+          <a:chExt cx="0" cy="0"/>
+        </a:xfrm>
+      </p:grpSpPr>
+      <p:sp>
+        <p:nvSpPr>
+          <p:cNvPr id="2" name="제목 1"/>
+          <p:cNvSpPr>
+            <a:spLocks noGrp="1"/>
+          </p:cNvSpPr>
+          <p:nvPr>
+            <p:ph type="title"/>
+          </p:nvPr>
+        </p:nvSpPr>
+        <p:spPr/>
+        <p:txBody>
+          <a:bodyPr/>
+          <a:lstStyle/>
+          <a:p>
+            <a:r>
+              <a:rPr lang="en-US" altLang="ko-KR" dirty="0" smtClean="0"/>
+              <a:t>10_CNT_C</a:t>
+            </a:r>
+            <a:r>
+              <a:rPr lang="ko-KR" altLang="en-US" dirty="0" smtClean="0"/>
+              <a:t>의 회로도</a:t>
+            </a:r>
+            <a:endParaRPr lang="ko-KR" altLang="en-US" dirty="0"/>
+          </a:p>
+        </p:txBody>
+      </p:sp>
+      <p:pic>
+        <p:nvPicPr>
+          <p:cNvPr id="4" name="내용 개체 틀 3"/>
+          <p:cNvPicPr>
+            <a:picLocks noGrp="1" noChangeAspect="1"/>
+          </p:cNvPicPr>
+          <p:nvPr>
+            <p:ph idx="1"/>
+          </p:nvPr>
+        </p:nvPicPr>
+        <p:blipFill>
+          <a:blip r:embed="rId2"/>
+          <a:stretch>
+            <a:fillRect/>
+          </a:stretch>
+        </p:blipFill>
+        <p:spPr>
+          <a:xfrm>
+            <a:off x="838200" y="1873775"/>
+            <a:ext cx="6085114" cy="4265768"/>
+          </a:xfrm>
+          <a:prstGeom prst="rect">
+            <a:avLst/>
+          </a:prstGeom>
+        </p:spPr>
+      </p:pic>
+    </p:spTree>
+    <p:extLst>
+      <p:ext uri="{BB962C8B-B14F-4D97-AF65-F5344CB8AC3E}">
+        <p14:creationId xmlns:p14="http://schemas.microsoft.com/office/powerpoint/2010/main" val="3711245157"/>
       </p:ext>
     </p:extLst>
   </p:cSld>

--- a/VLSI design 설계 실습/2025-05-29.pptx
+++ b/VLSI design 설계 실습/2025-05-29.pptx
@@ -3675,7 +3675,19 @@
           <a:bodyPr/>
           <a:lstStyle/>
           <a:p>
-            <a:endParaRPr lang="ko-KR" altLang="en-US"/>
+            <a:r>
+              <a:rPr lang="en-US" altLang="ko-KR" dirty="0" smtClean="0"/>
+              <a:t>10_CNT_C(10</a:t>
+            </a:r>
+            <a:r>
+              <a:rPr lang="ko-KR" altLang="en-US" dirty="0" smtClean="0"/>
+              <a:t>진 카운터</a:t>
+            </a:r>
+            <a:r>
+              <a:rPr lang="en-US" altLang="ko-KR" dirty="0" smtClean="0"/>
+              <a:t>)</a:t>
+            </a:r>
+            <a:endParaRPr lang="ko-KR" altLang="en-US" dirty="0"/>
           </a:p>
         </p:txBody>
       </p:sp>
@@ -3694,7 +3706,39 @@
           <a:bodyPr/>
           <a:lstStyle/>
           <a:p>
-            <a:endParaRPr lang="ko-KR" altLang="en-US"/>
+            <a:r>
+              <a:rPr lang="ko-KR" altLang="en-US" dirty="0" smtClean="0"/>
+              <a:t>입력 </a:t>
+            </a:r>
+            <a:r>
+              <a:rPr lang="ko-KR" altLang="en-US" dirty="0" smtClean="0"/>
+              <a:t>신호</a:t>
+            </a:r>
+            <a:r>
+              <a:rPr lang="en-US" altLang="ko-KR" dirty="0" smtClean="0"/>
+              <a:t>: CLK, RESET</a:t>
+            </a:r>
+          </a:p>
+          <a:p>
+            <a:r>
+              <a:rPr lang="ko-KR" altLang="en-US" dirty="0" smtClean="0"/>
+              <a:t>출력 신호</a:t>
+            </a:r>
+            <a:r>
+              <a:rPr lang="en-US" altLang="ko-KR" dirty="0" smtClean="0"/>
+              <a:t>: Q[3:0] </a:t>
+            </a:r>
+          </a:p>
+          <a:p>
+            <a:r>
+              <a:rPr lang="ko-KR" altLang="en-US" dirty="0" smtClean="0"/>
+              <a:t>작동 방식</a:t>
+            </a:r>
+            <a:r>
+              <a:rPr lang="en-US" altLang="ko-KR" smtClean="0"/>
+              <a:t>: </a:t>
+            </a:r>
+            <a:endParaRPr lang="ko-KR" altLang="en-US" dirty="0"/>
           </a:p>
         </p:txBody>
       </p:sp>
@@ -4322,11 +4366,7 @@
           <a:p>
             <a:r>
               <a:rPr lang="en-US" altLang="ko-KR" dirty="0" smtClean="0"/>
-              <a:t>6</a:t>
-            </a:r>
-            <a:r>
-              <a:rPr lang="en-US" altLang="ko-KR" dirty="0" smtClean="0"/>
-              <a:t>_CNT_C</a:t>
+              <a:t>6_CNT_C</a:t>
             </a:r>
             <a:r>
               <a:rPr lang="ko-KR" altLang="en-US" dirty="0" smtClean="0"/>
@@ -4431,7 +4471,19 @@
           <a:bodyPr/>
           <a:lstStyle/>
           <a:p>
-            <a:endParaRPr lang="ko-KR" altLang="en-US"/>
+            <a:r>
+              <a:rPr lang="en-US" altLang="ko-KR" dirty="0" smtClean="0"/>
+              <a:t>6_CNT_C(6</a:t>
+            </a:r>
+            <a:r>
+              <a:rPr lang="ko-KR" altLang="en-US" dirty="0" smtClean="0"/>
+              <a:t>진 카운터</a:t>
+            </a:r>
+            <a:r>
+              <a:rPr lang="en-US" altLang="ko-KR" dirty="0" smtClean="0"/>
+              <a:t>)</a:t>
+            </a:r>
+            <a:endParaRPr lang="ko-KR" altLang="en-US" dirty="0"/>
           </a:p>
         </p:txBody>
       </p:sp>
@@ -4450,7 +4502,103 @@
           <a:bodyPr/>
           <a:lstStyle/>
           <a:p>
-            <a:endParaRPr lang="ko-KR" altLang="en-US"/>
+            <a:r>
+              <a:rPr lang="ko-KR" altLang="en-US" dirty="0" smtClean="0"/>
+              <a:t>입력 신호</a:t>
+            </a:r>
+            <a:r>
+              <a:rPr lang="en-US" altLang="ko-KR" dirty="0" smtClean="0"/>
+              <a:t>: CLK, RESET</a:t>
+            </a:r>
+          </a:p>
+          <a:p>
+            <a:r>
+              <a:rPr lang="ko-KR" altLang="en-US" dirty="0" smtClean="0"/>
+              <a:t>출력 신호</a:t>
+            </a:r>
+            <a:r>
+              <a:rPr lang="en-US" altLang="ko-KR" dirty="0" smtClean="0"/>
+              <a:t>: </a:t>
+            </a:r>
+            <a:r>
+              <a:rPr lang="en-US" altLang="ko-KR" dirty="0" smtClean="0"/>
+              <a:t>Q[2:0]</a:t>
+            </a:r>
+          </a:p>
+          <a:p>
+            <a:r>
+              <a:rPr lang="ko-KR" altLang="en-US" dirty="0" smtClean="0"/>
+              <a:t>작동 방식</a:t>
+            </a:r>
+            <a:r>
+              <a:rPr lang="en-US" altLang="ko-KR" dirty="0" smtClean="0"/>
+              <a:t>: CLK</a:t>
+            </a:r>
+            <a:r>
+              <a:rPr lang="ko-KR" altLang="en-US" dirty="0" smtClean="0"/>
+              <a:t>의 </a:t>
+            </a:r>
+            <a:r>
+              <a:rPr lang="ko-KR" altLang="en-US" dirty="0" err="1" smtClean="0"/>
+              <a:t>엣지에</a:t>
+            </a:r>
+            <a:r>
+              <a:rPr lang="ko-KR" altLang="en-US" dirty="0" smtClean="0"/>
+              <a:t> 따라 </a:t>
+            </a:r>
+            <a:r>
+              <a:rPr lang="en-US" altLang="ko-KR" dirty="0" smtClean="0"/>
+              <a:t>Q </a:t>
+            </a:r>
+            <a:r>
+              <a:rPr lang="ko-KR" altLang="en-US" dirty="0" smtClean="0"/>
+              <a:t>값이 증가하고</a:t>
+            </a:r>
+            <a:r>
+              <a:rPr lang="en-US" altLang="ko-KR" dirty="0" smtClean="0"/>
+              <a:t>, Q</a:t>
+            </a:r>
+            <a:r>
+              <a:rPr lang="ko-KR" altLang="en-US" dirty="0" smtClean="0"/>
+              <a:t>가 </a:t>
+            </a:r>
+            <a:r>
+              <a:rPr lang="en-US" altLang="ko-KR" dirty="0" smtClean="0"/>
+              <a:t>5</a:t>
+            </a:r>
+            <a:r>
+              <a:rPr lang="ko-KR" altLang="en-US" dirty="0" smtClean="0"/>
+              <a:t>의 값을 가지면</a:t>
+            </a:r>
+            <a:r>
+              <a:rPr lang="en-US" altLang="ko-KR" dirty="0" smtClean="0"/>
+              <a:t>, </a:t>
+            </a:r>
+            <a:r>
+              <a:rPr lang="ko-KR" altLang="en-US" dirty="0" smtClean="0"/>
+              <a:t>다음 </a:t>
+            </a:r>
+            <a:r>
+              <a:rPr lang="en-US" altLang="ko-KR" dirty="0" smtClean="0"/>
+              <a:t>CLK</a:t>
+            </a:r>
+            <a:r>
+              <a:rPr lang="ko-KR" altLang="en-US" dirty="0" smtClean="0"/>
+              <a:t>에서는 다시 </a:t>
+            </a:r>
+            <a:r>
+              <a:rPr lang="en-US" altLang="ko-KR" dirty="0" smtClean="0"/>
+              <a:t>0</a:t>
+            </a:r>
+            <a:r>
+              <a:rPr lang="ko-KR" altLang="en-US" dirty="0" smtClean="0"/>
+              <a:t>으로 돌아간다</a:t>
+            </a:r>
+            <a:r>
+              <a:rPr lang="en-US" altLang="ko-KR" dirty="0" smtClean="0"/>
+              <a:t>.</a:t>
+            </a:r>
+            <a:endParaRPr lang="ko-KR" altLang="en-US" dirty="0"/>
           </a:p>
         </p:txBody>
       </p:sp>
@@ -4530,7 +4678,7 @@
         <p:spPr>
           <a:xfrm>
             <a:off x="838200" y="1873775"/>
-            <a:ext cx="6085114" cy="4265768"/>
+            <a:ext cx="10515600" cy="4265768"/>
           </a:xfrm>
           <a:prstGeom prst="rect">
             <a:avLst/>

--- a/VLSI design 설계 실습/2025-05-29.pptx
+++ b/VLSI design 설계 실습/2025-05-29.pptx
@@ -15,6 +15,7 @@
     <p:sldId id="263" r:id="rId9"/>
     <p:sldId id="264" r:id="rId10"/>
     <p:sldId id="265" r:id="rId11"/>
+    <p:sldId id="266" r:id="rId12"/>
   </p:sldIdLst>
   <p:sldSz cx="12192000" cy="6858000"/>
   <p:notesSz cx="6858000" cy="9144000"/>
@@ -3676,15 +3677,15 @@
           <a:lstStyle/>
           <a:p>
             <a:r>
-              <a:rPr lang="en-US" altLang="ko-KR" dirty="0" smtClean="0"/>
+              <a:rPr lang="en-US" altLang="ko-KR" dirty="0"/>
               <a:t>10_CNT_C(10</a:t>
             </a:r>
             <a:r>
-              <a:rPr lang="ko-KR" altLang="en-US" dirty="0" smtClean="0"/>
+              <a:rPr lang="ko-KR" altLang="en-US" dirty="0"/>
               <a:t>진 카운터</a:t>
             </a:r>
             <a:r>
-              <a:rPr lang="en-US" altLang="ko-KR" dirty="0" smtClean="0"/>
+              <a:rPr lang="en-US" altLang="ko-KR" dirty="0"/>
               <a:t>)</a:t>
             </a:r>
             <a:endParaRPr lang="ko-KR" altLang="en-US" dirty="0"/>
@@ -3703,42 +3704,136 @@
         </p:nvSpPr>
         <p:spPr/>
         <p:txBody>
-          <a:bodyPr/>
-          <a:lstStyle/>
-          <a:p>
-            <a:r>
-              <a:rPr lang="ko-KR" altLang="en-US" dirty="0" smtClean="0"/>
-              <a:t>입력 </a:t>
-            </a:r>
-            <a:r>
-              <a:rPr lang="ko-KR" altLang="en-US" dirty="0" smtClean="0"/>
-              <a:t>신호</a:t>
-            </a:r>
-            <a:r>
-              <a:rPr lang="en-US" altLang="ko-KR" dirty="0" smtClean="0"/>
+          <a:bodyPr>
+            <a:normAutofit/>
+          </a:bodyPr>
+          <a:lstStyle/>
+          <a:p>
+            <a:r>
+              <a:rPr lang="ko-KR" altLang="en-US" sz="2400" dirty="0"/>
+              <a:t>입력 신호</a:t>
+            </a:r>
+            <a:r>
+              <a:rPr lang="en-US" altLang="ko-KR" sz="2400" dirty="0"/>
               <a:t>: CLK, RESET</a:t>
             </a:r>
           </a:p>
           <a:p>
             <a:r>
-              <a:rPr lang="ko-KR" altLang="en-US" dirty="0" smtClean="0"/>
+              <a:rPr lang="ko-KR" altLang="en-US" sz="2400" dirty="0"/>
               <a:t>출력 신호</a:t>
             </a:r>
             <a:r>
-              <a:rPr lang="en-US" altLang="ko-KR" dirty="0" smtClean="0"/>
-              <a:t>: Q[3:0] </a:t>
-            </a:r>
-          </a:p>
-          <a:p>
-            <a:r>
-              <a:rPr lang="ko-KR" altLang="en-US" dirty="0" smtClean="0"/>
+              <a:rPr lang="en-US" altLang="ko-KR" sz="2400" dirty="0"/>
+              <a:t>: Q[4:0] </a:t>
+            </a:r>
+          </a:p>
+          <a:p>
+            <a:r>
+              <a:rPr lang="ko-KR" altLang="en-US" sz="2400" dirty="0"/>
               <a:t>작동 방식</a:t>
             </a:r>
             <a:r>
-              <a:rPr lang="en-US" altLang="ko-KR" smtClean="0"/>
-              <a:t>: </a:t>
-            </a:r>
-            <a:endParaRPr lang="ko-KR" altLang="en-US" dirty="0"/>
+              <a:rPr lang="en-US" altLang="ko-KR" sz="2400" dirty="0"/>
+              <a:t>: CLK</a:t>
+            </a:r>
+            <a:r>
+              <a:rPr lang="ko-KR" altLang="en-US" sz="2400" dirty="0"/>
+              <a:t>의 </a:t>
+            </a:r>
+            <a:r>
+              <a:rPr lang="ko-KR" altLang="en-US" sz="2400" dirty="0" err="1"/>
+              <a:t>엣지에</a:t>
+            </a:r>
+            <a:r>
+              <a:rPr lang="ko-KR" altLang="en-US" sz="2400" dirty="0"/>
+              <a:t> 따라 </a:t>
+            </a:r>
+            <a:r>
+              <a:rPr lang="en-US" altLang="ko-KR" sz="2400" dirty="0"/>
+              <a:t>Q </a:t>
+            </a:r>
+            <a:r>
+              <a:rPr lang="ko-KR" altLang="en-US" sz="2400" dirty="0"/>
+              <a:t>값이 증가하고</a:t>
+            </a:r>
+            <a:r>
+              <a:rPr lang="en-US" altLang="ko-KR" sz="2400" dirty="0"/>
+              <a:t>, Q</a:t>
+            </a:r>
+            <a:r>
+              <a:rPr lang="ko-KR" altLang="en-US" sz="2400" dirty="0"/>
+              <a:t>가 </a:t>
+            </a:r>
+            <a:r>
+              <a:rPr lang="en-US" altLang="ko-KR" sz="2400" dirty="0"/>
+              <a:t>9</a:t>
+            </a:r>
+            <a:r>
+              <a:rPr lang="ko-KR" altLang="en-US" sz="2400" dirty="0"/>
+              <a:t>의 값을 가지면</a:t>
+            </a:r>
+            <a:r>
+              <a:rPr lang="en-US" altLang="ko-KR" sz="2400" dirty="0"/>
+              <a:t>, </a:t>
+            </a:r>
+            <a:r>
+              <a:rPr lang="ko-KR" altLang="en-US" sz="2400" dirty="0"/>
+              <a:t>다음 </a:t>
+            </a:r>
+            <a:r>
+              <a:rPr lang="en-US" altLang="ko-KR" sz="2400" dirty="0"/>
+              <a:t>CLK</a:t>
+            </a:r>
+            <a:r>
+              <a:rPr lang="ko-KR" altLang="en-US" sz="2400" dirty="0"/>
+              <a:t>에서는 다시 </a:t>
+            </a:r>
+            <a:r>
+              <a:rPr lang="en-US" altLang="ko-KR" sz="2400" dirty="0"/>
+              <a:t>0</a:t>
+            </a:r>
+            <a:r>
+              <a:rPr lang="ko-KR" altLang="en-US" sz="2400" dirty="0"/>
+              <a:t>으로 돌아간다</a:t>
+            </a:r>
+            <a:r>
+              <a:rPr lang="en-US" altLang="ko-KR" sz="2400" dirty="0"/>
+              <a:t>. </a:t>
+            </a:r>
+          </a:p>
+          <a:p>
+            <a:r>
+              <a:rPr lang="en-US" altLang="ko-KR" sz="2400" dirty="0"/>
+              <a:t>6</a:t>
+            </a:r>
+            <a:r>
+              <a:rPr lang="ko-KR" altLang="en-US" sz="2400" dirty="0"/>
+              <a:t>진 카운터와 다른 점은 플립플롭 수</a:t>
+            </a:r>
+            <a:r>
+              <a:rPr lang="en-US" altLang="ko-KR" sz="2400" dirty="0"/>
+              <a:t>, </a:t>
+            </a:r>
+            <a:r>
+              <a:rPr lang="ko-KR" altLang="en-US" sz="2400" dirty="0"/>
+              <a:t>리셋 조건</a:t>
+            </a:r>
+            <a:r>
+              <a:rPr lang="en-US" altLang="ko-KR" sz="2400" dirty="0"/>
+              <a:t>, </a:t>
+            </a:r>
+            <a:r>
+              <a:rPr lang="ko-KR" altLang="en-US" sz="2400" dirty="0"/>
+              <a:t>논리 복잡도가 있다</a:t>
+            </a:r>
+            <a:r>
+              <a:rPr lang="en-US" altLang="ko-KR" sz="2400" dirty="0"/>
+              <a:t>.</a:t>
+            </a:r>
+          </a:p>
+          <a:p>
+            <a:endParaRPr lang="ko-KR" altLang="en-US" sz="2400" dirty="0"/>
           </a:p>
         </p:txBody>
       </p:sp>
@@ -3746,6 +3841,105 @@
     <p:extLst>
       <p:ext uri="{BB962C8B-B14F-4D97-AF65-F5344CB8AC3E}">
         <p14:creationId xmlns:p14="http://schemas.microsoft.com/office/powerpoint/2010/main" val="2769984220"/>
+      </p:ext>
+    </p:extLst>
+  </p:cSld>
+  <p:clrMapOvr>
+    <a:masterClrMapping/>
+  </p:clrMapOvr>
+</p:sld>
+</file>
+
+<file path=ppt/slides/slide11.xml><?xml version="1.0" encoding="utf-8"?>
+<p:sld xmlns:a="http://schemas.openxmlformats.org/drawingml/2006/main" xmlns:r="http://schemas.openxmlformats.org/officeDocument/2006/relationships" xmlns:p="http://schemas.openxmlformats.org/presentationml/2006/main">
+  <p:cSld>
+    <p:spTree>
+      <p:nvGrpSpPr>
+        <p:cNvPr id="1" name=""/>
+        <p:cNvGrpSpPr/>
+        <p:nvPr/>
+      </p:nvGrpSpPr>
+      <p:grpSpPr>
+        <a:xfrm>
+          <a:off x="0" y="0"/>
+          <a:ext cx="0" cy="0"/>
+          <a:chOff x="0" y="0"/>
+          <a:chExt cx="0" cy="0"/>
+        </a:xfrm>
+      </p:grpSpPr>
+      <p:sp>
+        <p:nvSpPr>
+          <p:cNvPr id="2" name="제목 1">
+            <a:extLst>
+              <a:ext uri="{FF2B5EF4-FFF2-40B4-BE49-F238E27FC236}">
+                <a16:creationId xmlns:a16="http://schemas.microsoft.com/office/drawing/2014/main" id="{BD11FE43-6A74-9502-10F2-F5D68D65CDB9}"/>
+              </a:ext>
+            </a:extLst>
+          </p:cNvPr>
+          <p:cNvSpPr>
+            <a:spLocks noGrp="1"/>
+          </p:cNvSpPr>
+          <p:nvPr>
+            <p:ph type="title"/>
+          </p:nvPr>
+        </p:nvSpPr>
+        <p:spPr/>
+        <p:txBody>
+          <a:bodyPr/>
+          <a:lstStyle/>
+          <a:p>
+            <a:r>
+              <a:rPr lang="en-US" altLang="ko-KR" dirty="0"/>
+              <a:t>6</a:t>
+            </a:r>
+            <a:r>
+              <a:rPr lang="ko-KR" altLang="en-US" dirty="0"/>
+              <a:t>진 카운터와 </a:t>
+            </a:r>
+            <a:r>
+              <a:rPr lang="en-US" altLang="ko-KR" dirty="0"/>
+              <a:t>10</a:t>
+            </a:r>
+            <a:r>
+              <a:rPr lang="ko-KR" altLang="en-US" dirty="0"/>
+              <a:t>진 카운터의 비교</a:t>
+            </a:r>
+          </a:p>
+        </p:txBody>
+      </p:sp>
+      <p:pic>
+        <p:nvPicPr>
+          <p:cNvPr id="5" name="내용 개체 틀 4">
+            <a:extLst>
+              <a:ext uri="{FF2B5EF4-FFF2-40B4-BE49-F238E27FC236}">
+                <a16:creationId xmlns:a16="http://schemas.microsoft.com/office/drawing/2014/main" id="{9E5ED6DB-A708-C44B-5002-AA7F6ABAD176}"/>
+              </a:ext>
+            </a:extLst>
+          </p:cNvPr>
+          <p:cNvPicPr>
+            <a:picLocks noGrp="1" noChangeAspect="1"/>
+          </p:cNvPicPr>
+          <p:nvPr>
+            <p:ph idx="1"/>
+          </p:nvPr>
+        </p:nvPicPr>
+        <p:blipFill>
+          <a:blip r:embed="rId2"/>
+          <a:stretch>
+            <a:fillRect/>
+          </a:stretch>
+        </p:blipFill>
+        <p:spPr>
+          <a:xfrm>
+            <a:off x="920797" y="1690687"/>
+            <a:ext cx="10430113" cy="4041039"/>
+          </a:xfrm>
+        </p:spPr>
+      </p:pic>
+    </p:spTree>
+    <p:extLst>
+      <p:ext uri="{BB962C8B-B14F-4D97-AF65-F5344CB8AC3E}">
+        <p14:creationId xmlns:p14="http://schemas.microsoft.com/office/powerpoint/2010/main" val="1009951824"/>
       </p:ext>
     </p:extLst>
   </p:cSld>
@@ -4266,14 +4460,10 @@
           <a:p>
             <a:r>
               <a:rPr lang="en-US" altLang="ko-KR" dirty="0"/>
-              <a:t>CMOS </a:t>
-            </a:r>
-            <a:r>
-              <a:rPr lang="en-US" altLang="ko-KR" dirty="0" smtClean="0"/>
-              <a:t>NOR </a:t>
-            </a:r>
-            <a:r>
-              <a:rPr lang="ko-KR" altLang="en-US" dirty="0" smtClean="0"/>
+              <a:t>CMOS NOR </a:t>
+            </a:r>
+            <a:r>
+              <a:rPr lang="ko-KR" altLang="en-US" dirty="0"/>
               <a:t>게이트의 </a:t>
             </a:r>
             <a:r>
@@ -4365,14 +4555,13 @@
           <a:lstStyle/>
           <a:p>
             <a:r>
-              <a:rPr lang="en-US" altLang="ko-KR" dirty="0" smtClean="0"/>
+              <a:rPr lang="en-US" altLang="ko-KR" dirty="0"/>
               <a:t>6_CNT_C</a:t>
             </a:r>
             <a:r>
-              <a:rPr lang="ko-KR" altLang="en-US" dirty="0" smtClean="0"/>
+              <a:rPr lang="ko-KR" altLang="en-US" dirty="0"/>
               <a:t>의 회로도</a:t>
             </a:r>
-            <a:endParaRPr lang="ko-KR" altLang="en-US" dirty="0"/>
           </a:p>
         </p:txBody>
       </p:sp>
@@ -4472,15 +4661,15 @@
           <a:lstStyle/>
           <a:p>
             <a:r>
-              <a:rPr lang="en-US" altLang="ko-KR" dirty="0" smtClean="0"/>
+              <a:rPr lang="en-US" altLang="ko-KR" dirty="0"/>
               <a:t>6_CNT_C(6</a:t>
             </a:r>
             <a:r>
-              <a:rPr lang="ko-KR" altLang="en-US" dirty="0" smtClean="0"/>
+              <a:rPr lang="ko-KR" altLang="en-US" dirty="0"/>
               <a:t>진 카운터</a:t>
             </a:r>
             <a:r>
-              <a:rPr lang="en-US" altLang="ko-KR" dirty="0" smtClean="0"/>
+              <a:rPr lang="en-US" altLang="ko-KR" dirty="0"/>
               <a:t>)</a:t>
             </a:r>
             <a:endParaRPr lang="ko-KR" altLang="en-US" dirty="0"/>
@@ -4499,106 +4688,162 @@
         </p:nvSpPr>
         <p:spPr/>
         <p:txBody>
-          <a:bodyPr/>
-          <a:lstStyle/>
-          <a:p>
-            <a:r>
-              <a:rPr lang="ko-KR" altLang="en-US" dirty="0" smtClean="0"/>
+          <a:bodyPr>
+            <a:normAutofit/>
+          </a:bodyPr>
+          <a:lstStyle/>
+          <a:p>
+            <a:r>
+              <a:rPr lang="ko-KR" altLang="en-US" sz="2400" dirty="0"/>
               <a:t>입력 신호</a:t>
             </a:r>
             <a:r>
-              <a:rPr lang="en-US" altLang="ko-KR" dirty="0" smtClean="0"/>
+              <a:rPr lang="en-US" altLang="ko-KR" sz="2400" dirty="0"/>
               <a:t>: CLK, RESET</a:t>
             </a:r>
           </a:p>
           <a:p>
             <a:r>
-              <a:rPr lang="ko-KR" altLang="en-US" dirty="0" smtClean="0"/>
+              <a:rPr lang="ko-KR" altLang="en-US" sz="2400" dirty="0"/>
               <a:t>출력 신호</a:t>
             </a:r>
             <a:r>
-              <a:rPr lang="en-US" altLang="ko-KR" dirty="0" smtClean="0"/>
+              <a:rPr lang="en-US" altLang="ko-KR" sz="2400" dirty="0"/>
+              <a:t>: Q[2:0]</a:t>
+            </a:r>
+          </a:p>
+          <a:p>
+            <a:r>
+              <a:rPr lang="ko-KR" altLang="en-US" sz="2400" dirty="0"/>
+              <a:t>작동 방식</a:t>
+            </a:r>
+            <a:r>
+              <a:rPr lang="en-US" altLang="ko-KR" sz="2400" dirty="0"/>
+              <a:t>: CLK</a:t>
+            </a:r>
+            <a:r>
+              <a:rPr lang="ko-KR" altLang="en-US" sz="2400" dirty="0"/>
+              <a:t>의 </a:t>
+            </a:r>
+            <a:r>
+              <a:rPr lang="ko-KR" altLang="en-US" sz="2400" dirty="0" err="1"/>
+              <a:t>엣지에</a:t>
+            </a:r>
+            <a:r>
+              <a:rPr lang="ko-KR" altLang="en-US" sz="2400" dirty="0"/>
+              <a:t> 따라 </a:t>
+            </a:r>
+            <a:r>
+              <a:rPr lang="en-US" altLang="ko-KR" sz="2400" dirty="0"/>
+              <a:t>Q </a:t>
+            </a:r>
+            <a:r>
+              <a:rPr lang="ko-KR" altLang="en-US" sz="2400" dirty="0"/>
+              <a:t>값이 증가하고</a:t>
+            </a:r>
+            <a:r>
+              <a:rPr lang="en-US" altLang="ko-KR" sz="2400" dirty="0"/>
+              <a:t>, Q</a:t>
+            </a:r>
+            <a:r>
+              <a:rPr lang="ko-KR" altLang="en-US" sz="2400" dirty="0"/>
+              <a:t>가 </a:t>
+            </a:r>
+            <a:r>
+              <a:rPr lang="en-US" altLang="ko-KR" sz="2400" dirty="0"/>
+              <a:t>5</a:t>
+            </a:r>
+            <a:r>
+              <a:rPr lang="ko-KR" altLang="en-US" sz="2400" dirty="0"/>
+              <a:t>의 값을 가지면</a:t>
+            </a:r>
+            <a:r>
+              <a:rPr lang="en-US" altLang="ko-KR" sz="2400" dirty="0"/>
+              <a:t>, </a:t>
+            </a:r>
+            <a:r>
+              <a:rPr lang="ko-KR" altLang="en-US" sz="2400" dirty="0"/>
+              <a:t>다음 </a:t>
+            </a:r>
+            <a:r>
+              <a:rPr lang="en-US" altLang="ko-KR" sz="2400" dirty="0"/>
+              <a:t>CLK</a:t>
+            </a:r>
+            <a:r>
+              <a:rPr lang="ko-KR" altLang="en-US" sz="2400" dirty="0"/>
+              <a:t>에서는 다시 </a:t>
+            </a:r>
+            <a:r>
+              <a:rPr lang="en-US" altLang="ko-KR" sz="2400" dirty="0"/>
+              <a:t>0</a:t>
+            </a:r>
+            <a:r>
+              <a:rPr lang="ko-KR" altLang="en-US" sz="2400" dirty="0"/>
+              <a:t>으로 돌아간다</a:t>
+            </a:r>
+            <a:r>
+              <a:rPr lang="en-US" altLang="ko-KR" sz="2400" dirty="0"/>
+              <a:t>.</a:t>
+            </a:r>
+          </a:p>
+          <a:p>
+            <a:r>
+              <a:rPr lang="ko-KR" altLang="en-US" sz="2400" dirty="0"/>
+              <a:t>카운터 특성</a:t>
+            </a:r>
+            <a:r>
+              <a:rPr lang="en-US" altLang="ko-KR" sz="2400" dirty="0"/>
               <a:t>: </a:t>
             </a:r>
             <a:r>
-              <a:rPr lang="en-US" altLang="ko-KR" dirty="0" smtClean="0"/>
-              <a:t>Q[2:0]</a:t>
-            </a:r>
-          </a:p>
-          <a:p>
-            <a:r>
-              <a:rPr lang="ko-KR" altLang="en-US" dirty="0" smtClean="0"/>
-              <a:t>작동 방식</a:t>
-            </a:r>
-            <a:r>
-              <a:rPr lang="en-US" altLang="ko-KR" dirty="0" smtClean="0"/>
-              <a:t>: CLK</a:t>
-            </a:r>
-            <a:r>
-              <a:rPr lang="ko-KR" altLang="en-US" dirty="0" smtClean="0"/>
-              <a:t>의 </a:t>
-            </a:r>
-            <a:r>
-              <a:rPr lang="ko-KR" altLang="en-US" dirty="0" err="1" smtClean="0"/>
-              <a:t>엣지에</a:t>
-            </a:r>
-            <a:r>
-              <a:rPr lang="ko-KR" altLang="en-US" dirty="0" smtClean="0"/>
-              <a:t> 따라 </a:t>
-            </a:r>
-            <a:r>
-              <a:rPr lang="en-US" altLang="ko-KR" dirty="0" smtClean="0"/>
-              <a:t>Q </a:t>
-            </a:r>
-            <a:r>
-              <a:rPr lang="ko-KR" altLang="en-US" dirty="0" smtClean="0"/>
-              <a:t>값이 증가하고</a:t>
-            </a:r>
-            <a:r>
-              <a:rPr lang="en-US" altLang="ko-KR" dirty="0" smtClean="0"/>
-              <a:t>, Q</a:t>
-            </a:r>
-            <a:r>
-              <a:rPr lang="ko-KR" altLang="en-US" dirty="0" smtClean="0"/>
-              <a:t>가 </a:t>
-            </a:r>
-            <a:r>
-              <a:rPr lang="en-US" altLang="ko-KR" dirty="0" smtClean="0"/>
-              <a:t>5</a:t>
-            </a:r>
-            <a:r>
-              <a:rPr lang="ko-KR" altLang="en-US" dirty="0" smtClean="0"/>
-              <a:t>의 값을 가지면</a:t>
-            </a:r>
-            <a:r>
-              <a:rPr lang="en-US" altLang="ko-KR" dirty="0" smtClean="0"/>
+              <a:rPr lang="ko-KR" altLang="en-US" sz="2400" dirty="0"/>
+              <a:t>모든 </a:t>
+            </a:r>
+            <a:r>
+              <a:rPr lang="ko-KR" altLang="en-US" sz="2400" dirty="0" err="1"/>
+              <a:t>플립플롭의</a:t>
+            </a:r>
+            <a:r>
+              <a:rPr lang="ko-KR" altLang="en-US" sz="2400" dirty="0"/>
+              <a:t> 클럭이 같은 입력 클럭을 통해서 연결되며</a:t>
+            </a:r>
+            <a:r>
+              <a:rPr lang="en-US" altLang="ko-KR" sz="2400" dirty="0"/>
               <a:t>, </a:t>
             </a:r>
             <a:r>
-              <a:rPr lang="ko-KR" altLang="en-US" dirty="0" smtClean="0"/>
-              <a:t>다음 </a:t>
-            </a:r>
-            <a:r>
-              <a:rPr lang="en-US" altLang="ko-KR" dirty="0" smtClean="0"/>
-              <a:t>CLK</a:t>
-            </a:r>
-            <a:r>
-              <a:rPr lang="ko-KR" altLang="en-US" dirty="0" smtClean="0"/>
-              <a:t>에서는 다시 </a:t>
-            </a:r>
-            <a:r>
-              <a:rPr lang="en-US" altLang="ko-KR" dirty="0" smtClean="0"/>
-              <a:t>0</a:t>
-            </a:r>
-            <a:r>
-              <a:rPr lang="ko-KR" altLang="en-US" dirty="0" smtClean="0"/>
-              <a:t>으로 돌아간다</a:t>
-            </a:r>
-            <a:r>
-              <a:rPr lang="en-US" altLang="ko-KR" dirty="0" smtClean="0"/>
+              <a:rPr lang="ko-KR" altLang="en-US" sz="2400" dirty="0"/>
+              <a:t>상태 전이는 클럭의 신호 상승</a:t>
+            </a:r>
+            <a:r>
+              <a:rPr lang="en-US" altLang="ko-KR" sz="2400" dirty="0"/>
+              <a:t>/</a:t>
+            </a:r>
+            <a:r>
+              <a:rPr lang="ko-KR" altLang="en-US" sz="2400" dirty="0"/>
+              <a:t>하강 </a:t>
+            </a:r>
+            <a:r>
+              <a:rPr lang="ko-KR" altLang="en-US" sz="2400" dirty="0" err="1"/>
+              <a:t>엣지에서</a:t>
+            </a:r>
+            <a:r>
+              <a:rPr lang="ko-KR" altLang="en-US" sz="2400" dirty="0"/>
+              <a:t> 동시에 발생한다</a:t>
+            </a:r>
+            <a:r>
+              <a:rPr lang="en-US" altLang="ko-KR" sz="2400" dirty="0"/>
+              <a:t>. </a:t>
+            </a:r>
+            <a:r>
+              <a:rPr lang="ko-KR" altLang="en-US" sz="2400" dirty="0"/>
+              <a:t>이로 인해 속도 측면에서 이점을 가진다</a:t>
+            </a:r>
+            <a:r>
+              <a:rPr lang="en-US" altLang="ko-KR" sz="2400" dirty="0"/>
               <a:t>.</a:t>
             </a:r>
-            <a:endParaRPr lang="ko-KR" altLang="en-US" dirty="0"/>
+            <a:endParaRPr lang="ko-KR" altLang="en-US" sz="2400" dirty="0"/>
           </a:p>
         </p:txBody>
       </p:sp>
@@ -4648,14 +4893,13 @@
           <a:lstStyle/>
           <a:p>
             <a:r>
-              <a:rPr lang="en-US" altLang="ko-KR" dirty="0" smtClean="0"/>
+              <a:rPr lang="en-US" altLang="ko-KR" dirty="0"/>
               <a:t>10_CNT_C</a:t>
             </a:r>
             <a:r>
-              <a:rPr lang="ko-KR" altLang="en-US" dirty="0" smtClean="0"/>
+              <a:rPr lang="ko-KR" altLang="en-US" dirty="0"/>
               <a:t>의 회로도</a:t>
             </a:r>
-            <a:endParaRPr lang="ko-KR" altLang="en-US" dirty="0"/>
           </a:p>
         </p:txBody>
       </p:sp>
